--- a/Documents/layout diagram.pptx
+++ b/Documents/layout diagram.pptx
@@ -7,6 +7,8 @@
   <p:sldIdLst>
     <p:sldId id="256" r:id="rId2"/>
     <p:sldId id="257" r:id="rId3"/>
+    <p:sldId id="258" r:id="rId4"/>
+    <p:sldId id="259" r:id="rId5"/>
   </p:sldIdLst>
   <p:sldSz cx="12192000" cy="6858000"/>
   <p:notesSz cx="6858000" cy="9144000"/>
@@ -105,6 +107,11 @@
       </a:defRPr>
     </a:lvl9pPr>
   </p:defaultTextStyle>
+  <p:extLst>
+    <p:ext uri="{EFAFB233-063F-42B5-8137-9DF3F51BA10A}">
+      <p15:sldGuideLst xmlns:p15="http://schemas.microsoft.com/office/powerpoint/2012/main"/>
+    </p:ext>
+  </p:extLst>
 </p:presentation>
 </file>
 
@@ -257,7 +264,7 @@
           <a:p>
             <a:fld id="{B7ECD55B-94AA-40FF-AB95-A06B07D49F4F}" type="datetimeFigureOut">
               <a:rPr lang="en-IN" smtClean="0"/>
-              <a:t>21-10-2026</a:t>
+              <a:t>25-10-2026</a:t>
             </a:fld>
             <a:endParaRPr lang="en-IN"/>
           </a:p>
@@ -457,7 +464,7 @@
           <a:p>
             <a:fld id="{B7ECD55B-94AA-40FF-AB95-A06B07D49F4F}" type="datetimeFigureOut">
               <a:rPr lang="en-IN" smtClean="0"/>
-              <a:t>21-10-2026</a:t>
+              <a:t>25-10-2026</a:t>
             </a:fld>
             <a:endParaRPr lang="en-IN"/>
           </a:p>
@@ -667,7 +674,7 @@
           <a:p>
             <a:fld id="{B7ECD55B-94AA-40FF-AB95-A06B07D49F4F}" type="datetimeFigureOut">
               <a:rPr lang="en-IN" smtClean="0"/>
-              <a:t>21-10-2026</a:t>
+              <a:t>25-10-2026</a:t>
             </a:fld>
             <a:endParaRPr lang="en-IN"/>
           </a:p>
@@ -867,7 +874,7 @@
           <a:p>
             <a:fld id="{B7ECD55B-94AA-40FF-AB95-A06B07D49F4F}" type="datetimeFigureOut">
               <a:rPr lang="en-IN" smtClean="0"/>
-              <a:t>21-10-2026</a:t>
+              <a:t>25-10-2026</a:t>
             </a:fld>
             <a:endParaRPr lang="en-IN"/>
           </a:p>
@@ -1143,7 +1150,7 @@
           <a:p>
             <a:fld id="{B7ECD55B-94AA-40FF-AB95-A06B07D49F4F}" type="datetimeFigureOut">
               <a:rPr lang="en-IN" smtClean="0"/>
-              <a:t>21-10-2026</a:t>
+              <a:t>25-10-2026</a:t>
             </a:fld>
             <a:endParaRPr lang="en-IN"/>
           </a:p>
@@ -1411,7 +1418,7 @@
           <a:p>
             <a:fld id="{B7ECD55B-94AA-40FF-AB95-A06B07D49F4F}" type="datetimeFigureOut">
               <a:rPr lang="en-IN" smtClean="0"/>
-              <a:t>21-10-2026</a:t>
+              <a:t>25-10-2026</a:t>
             </a:fld>
             <a:endParaRPr lang="en-IN"/>
           </a:p>
@@ -1826,7 +1833,7 @@
           <a:p>
             <a:fld id="{B7ECD55B-94AA-40FF-AB95-A06B07D49F4F}" type="datetimeFigureOut">
               <a:rPr lang="en-IN" smtClean="0"/>
-              <a:t>21-10-2026</a:t>
+              <a:t>25-10-2026</a:t>
             </a:fld>
             <a:endParaRPr lang="en-IN"/>
           </a:p>
@@ -1968,7 +1975,7 @@
           <a:p>
             <a:fld id="{B7ECD55B-94AA-40FF-AB95-A06B07D49F4F}" type="datetimeFigureOut">
               <a:rPr lang="en-IN" smtClean="0"/>
-              <a:t>21-10-2026</a:t>
+              <a:t>25-10-2026</a:t>
             </a:fld>
             <a:endParaRPr lang="en-IN"/>
           </a:p>
@@ -2081,7 +2088,7 @@
           <a:p>
             <a:fld id="{B7ECD55B-94AA-40FF-AB95-A06B07D49F4F}" type="datetimeFigureOut">
               <a:rPr lang="en-IN" smtClean="0"/>
-              <a:t>21-10-2026</a:t>
+              <a:t>25-10-2026</a:t>
             </a:fld>
             <a:endParaRPr lang="en-IN"/>
           </a:p>
@@ -2394,7 +2401,7 @@
           <a:p>
             <a:fld id="{B7ECD55B-94AA-40FF-AB95-A06B07D49F4F}" type="datetimeFigureOut">
               <a:rPr lang="en-IN" smtClean="0"/>
-              <a:t>21-10-2026</a:t>
+              <a:t>25-10-2026</a:t>
             </a:fld>
             <a:endParaRPr lang="en-IN"/>
           </a:p>
@@ -2683,7 +2690,7 @@
           <a:p>
             <a:fld id="{B7ECD55B-94AA-40FF-AB95-A06B07D49F4F}" type="datetimeFigureOut">
               <a:rPr lang="en-IN" smtClean="0"/>
-              <a:t>21-10-2026</a:t>
+              <a:t>25-10-2026</a:t>
             </a:fld>
             <a:endParaRPr lang="en-IN"/>
           </a:p>
@@ -2926,7 +2933,7 @@
           <a:p>
             <a:fld id="{B7ECD55B-94AA-40FF-AB95-A06B07D49F4F}" type="datetimeFigureOut">
               <a:rPr lang="en-IN" smtClean="0"/>
-              <a:t>21-10-2026</a:t>
+              <a:t>25-10-2026</a:t>
             </a:fld>
             <a:endParaRPr lang="en-IN"/>
           </a:p>
@@ -4236,7 +4243,7 @@
         </p:nvSpPr>
         <p:spPr>
           <a:xfrm>
-            <a:off x="9914382" y="5843982"/>
+            <a:off x="10669905" y="6493543"/>
             <a:ext cx="1309878" cy="301752"/>
           </a:xfrm>
           <a:prstGeom prst="roundRect">
@@ -4265,7 +4272,7 @@
           <a:p>
             <a:pPr algn="ctr"/>
             <a:r>
-              <a:rPr lang="en-IN" dirty="0"/>
+              <a:rPr lang="en-IN" sz="1600" dirty="0"/>
               <a:t>Download</a:t>
             </a:r>
           </a:p>
@@ -5201,8 +5208,8 @@
         </p:nvSpPr>
         <p:spPr>
           <a:xfrm>
-            <a:off x="3477006" y="5359350"/>
-            <a:ext cx="1415034" cy="301752"/>
+            <a:off x="8035292" y="4961182"/>
+            <a:ext cx="2160270" cy="301752"/>
           </a:xfrm>
           <a:prstGeom prst="roundRect">
             <a:avLst/>
@@ -5230,7 +5237,7 @@
           <a:p>
             <a:r>
               <a:rPr lang="en-IN" dirty="0"/>
-              <a:t>Total Salary</a:t>
+              <a:t>Grand Total Salary</a:t>
             </a:r>
           </a:p>
         </p:txBody>
@@ -5249,7 +5256,7 @@
         </p:nvSpPr>
         <p:spPr>
           <a:xfrm>
-            <a:off x="5065776" y="5359350"/>
+            <a:off x="10469882" y="3568304"/>
             <a:ext cx="1415034" cy="301752"/>
           </a:xfrm>
           <a:prstGeom prst="roundRect">
@@ -5283,10 +5290,908 @@
           </a:p>
         </p:txBody>
       </p:sp>
+      <p:sp>
+        <p:nvSpPr>
+          <p:cNvPr id="2" name="Rectangle: Rounded Corners 1">
+            <a:extLst>
+              <a:ext uri="{FF2B5EF4-FFF2-40B4-BE49-F238E27FC236}">
+                <a16:creationId xmlns:a16="http://schemas.microsoft.com/office/drawing/2014/main" id="{04EA2965-1B6E-6749-D37C-B61E54FA3986}"/>
+              </a:ext>
+            </a:extLst>
+          </p:cNvPr>
+          <p:cNvSpPr/>
+          <p:nvPr/>
+        </p:nvSpPr>
+        <p:spPr>
+          <a:xfrm>
+            <a:off x="10517888" y="4929767"/>
+            <a:ext cx="1415034" cy="364582"/>
+          </a:xfrm>
+          <a:prstGeom prst="roundRect">
+            <a:avLst/>
+          </a:prstGeom>
+        </p:spPr>
+        <p:style>
+          <a:lnRef idx="2">
+            <a:schemeClr val="accent1">
+              <a:shade val="15000"/>
+            </a:schemeClr>
+          </a:lnRef>
+          <a:fillRef idx="1">
+            <a:schemeClr val="accent1"/>
+          </a:fillRef>
+          <a:effectRef idx="0">
+            <a:schemeClr val="accent1"/>
+          </a:effectRef>
+          <a:fontRef idx="minor">
+            <a:schemeClr val="lt1"/>
+          </a:fontRef>
+        </p:style>
+        <p:txBody>
+          <a:bodyPr rtlCol="0" anchor="ctr"/>
+          <a:lstStyle/>
+          <a:p>
+            <a:pPr algn="ctr"/>
+            <a:r>
+              <a:rPr lang="en-IN" dirty="0"/>
+              <a:t>75844.00</a:t>
+            </a:r>
+          </a:p>
+        </p:txBody>
+      </p:sp>
+      <p:sp>
+        <p:nvSpPr>
+          <p:cNvPr id="4" name="Rectangle: Rounded Corners 3">
+            <a:extLst>
+              <a:ext uri="{FF2B5EF4-FFF2-40B4-BE49-F238E27FC236}">
+                <a16:creationId xmlns:a16="http://schemas.microsoft.com/office/drawing/2014/main" id="{B70CFCFA-665E-4297-D8E2-9522807004BA}"/>
+              </a:ext>
+            </a:extLst>
+          </p:cNvPr>
+          <p:cNvSpPr/>
+          <p:nvPr/>
+        </p:nvSpPr>
+        <p:spPr>
+          <a:xfrm>
+            <a:off x="8805674" y="3569196"/>
+            <a:ext cx="1538478" cy="301752"/>
+          </a:xfrm>
+          <a:prstGeom prst="roundRect">
+            <a:avLst/>
+          </a:prstGeom>
+        </p:spPr>
+        <p:style>
+          <a:lnRef idx="2">
+            <a:schemeClr val="accent1">
+              <a:shade val="15000"/>
+            </a:schemeClr>
+          </a:lnRef>
+          <a:fillRef idx="1">
+            <a:schemeClr val="accent1"/>
+          </a:fillRef>
+          <a:effectRef idx="0">
+            <a:schemeClr val="accent1"/>
+          </a:effectRef>
+          <a:fontRef idx="minor">
+            <a:schemeClr val="lt1"/>
+          </a:fontRef>
+        </p:style>
+        <p:txBody>
+          <a:bodyPr rtlCol="0" anchor="ctr"/>
+          <a:lstStyle/>
+          <a:p>
+            <a:r>
+              <a:rPr lang="en-IN" dirty="0"/>
+              <a:t>Total Salary</a:t>
+            </a:r>
+          </a:p>
+        </p:txBody>
+      </p:sp>
+      <p:sp>
+        <p:nvSpPr>
+          <p:cNvPr id="16" name="Rectangle: Rounded Corners 15">
+            <a:extLst>
+              <a:ext uri="{FF2B5EF4-FFF2-40B4-BE49-F238E27FC236}">
+                <a16:creationId xmlns:a16="http://schemas.microsoft.com/office/drawing/2014/main" id="{08373082-69DA-5F29-DF0F-5A5E5CC3448D}"/>
+              </a:ext>
+            </a:extLst>
+          </p:cNvPr>
+          <p:cNvSpPr/>
+          <p:nvPr/>
+        </p:nvSpPr>
+        <p:spPr>
+          <a:xfrm>
+            <a:off x="6189730" y="4077615"/>
+            <a:ext cx="1136142" cy="301752"/>
+          </a:xfrm>
+          <a:prstGeom prst="roundRect">
+            <a:avLst/>
+          </a:prstGeom>
+        </p:spPr>
+        <p:style>
+          <a:lnRef idx="2">
+            <a:schemeClr val="accent1">
+              <a:shade val="15000"/>
+            </a:schemeClr>
+          </a:lnRef>
+          <a:fillRef idx="1">
+            <a:schemeClr val="accent1"/>
+          </a:fillRef>
+          <a:effectRef idx="0">
+            <a:schemeClr val="accent1"/>
+          </a:effectRef>
+          <a:fontRef idx="minor">
+            <a:schemeClr val="lt1"/>
+          </a:fontRef>
+        </p:style>
+        <p:txBody>
+          <a:bodyPr rtlCol="0" anchor="ctr"/>
+          <a:lstStyle/>
+          <a:p>
+            <a:r>
+              <a:rPr lang="en-IN" dirty="0"/>
+              <a:t>Sunday</a:t>
+            </a:r>
+          </a:p>
+        </p:txBody>
+      </p:sp>
+      <p:sp>
+        <p:nvSpPr>
+          <p:cNvPr id="17" name="Rectangle: Rounded Corners 16">
+            <a:extLst>
+              <a:ext uri="{FF2B5EF4-FFF2-40B4-BE49-F238E27FC236}">
+                <a16:creationId xmlns:a16="http://schemas.microsoft.com/office/drawing/2014/main" id="{6132E0C4-AC3B-C7C6-DDAC-085DEC5DA346}"/>
+              </a:ext>
+            </a:extLst>
+          </p:cNvPr>
+          <p:cNvSpPr/>
+          <p:nvPr/>
+        </p:nvSpPr>
+        <p:spPr>
+          <a:xfrm>
+            <a:off x="7452362" y="4046200"/>
+            <a:ext cx="1415034" cy="364582"/>
+          </a:xfrm>
+          <a:prstGeom prst="roundRect">
+            <a:avLst/>
+          </a:prstGeom>
+        </p:spPr>
+        <p:style>
+          <a:lnRef idx="2">
+            <a:schemeClr val="accent1">
+              <a:shade val="15000"/>
+            </a:schemeClr>
+          </a:lnRef>
+          <a:fillRef idx="1">
+            <a:schemeClr val="accent1"/>
+          </a:fillRef>
+          <a:effectRef idx="0">
+            <a:schemeClr val="accent1"/>
+          </a:effectRef>
+          <a:fontRef idx="minor">
+            <a:schemeClr val="lt1"/>
+          </a:fontRef>
+        </p:style>
+        <p:txBody>
+          <a:bodyPr rtlCol="0" anchor="ctr"/>
+          <a:lstStyle/>
+          <a:p>
+            <a:pPr algn="ctr"/>
+            <a:r>
+              <a:rPr lang="en-IN" dirty="0"/>
+              <a:t>450.00</a:t>
+            </a:r>
+          </a:p>
+        </p:txBody>
+      </p:sp>
+      <p:sp>
+        <p:nvSpPr>
+          <p:cNvPr id="22" name="TextBox 21">
+            <a:extLst>
+              <a:ext uri="{FF2B5EF4-FFF2-40B4-BE49-F238E27FC236}">
+                <a16:creationId xmlns:a16="http://schemas.microsoft.com/office/drawing/2014/main" id="{014603C2-6678-1911-F535-B3BCB1F7FEBA}"/>
+              </a:ext>
+            </a:extLst>
+          </p:cNvPr>
+          <p:cNvSpPr txBox="1"/>
+          <p:nvPr/>
+        </p:nvSpPr>
+        <p:spPr>
+          <a:xfrm>
+            <a:off x="8877683" y="4024751"/>
+            <a:ext cx="337185" cy="369332"/>
+          </a:xfrm>
+          <a:prstGeom prst="rect">
+            <a:avLst/>
+          </a:prstGeom>
+          <a:noFill/>
+        </p:spPr>
+        <p:txBody>
+          <a:bodyPr wrap="square" rtlCol="0">
+            <a:spAutoFit/>
+          </a:bodyPr>
+          <a:lstStyle/>
+          <a:p>
+            <a:r>
+              <a:rPr lang="en-IN" dirty="0"/>
+              <a:t>X</a:t>
+            </a:r>
+          </a:p>
+        </p:txBody>
+      </p:sp>
+      <p:sp>
+        <p:nvSpPr>
+          <p:cNvPr id="26" name="Rectangle: Rounded Corners 25">
+            <a:extLst>
+              <a:ext uri="{FF2B5EF4-FFF2-40B4-BE49-F238E27FC236}">
+                <a16:creationId xmlns:a16="http://schemas.microsoft.com/office/drawing/2014/main" id="{F839AC7E-7118-CC6B-8415-308421018CAB}"/>
+              </a:ext>
+            </a:extLst>
+          </p:cNvPr>
+          <p:cNvSpPr/>
+          <p:nvPr/>
+        </p:nvSpPr>
+        <p:spPr>
+          <a:xfrm>
+            <a:off x="9177149" y="4027126"/>
+            <a:ext cx="690372" cy="364582"/>
+          </a:xfrm>
+          <a:prstGeom prst="roundRect">
+            <a:avLst/>
+          </a:prstGeom>
+        </p:spPr>
+        <p:style>
+          <a:lnRef idx="2">
+            <a:schemeClr val="accent1">
+              <a:shade val="15000"/>
+            </a:schemeClr>
+          </a:lnRef>
+          <a:fillRef idx="1">
+            <a:schemeClr val="accent1"/>
+          </a:fillRef>
+          <a:effectRef idx="0">
+            <a:schemeClr val="accent1"/>
+          </a:effectRef>
+          <a:fontRef idx="minor">
+            <a:schemeClr val="lt1"/>
+          </a:fontRef>
+        </p:style>
+        <p:txBody>
+          <a:bodyPr rtlCol="0" anchor="ctr"/>
+          <a:lstStyle/>
+          <a:p>
+            <a:pPr algn="ctr"/>
+            <a:r>
+              <a:rPr lang="en-IN" dirty="0"/>
+              <a:t>4</a:t>
+            </a:r>
+          </a:p>
+        </p:txBody>
+      </p:sp>
+      <p:sp>
+        <p:nvSpPr>
+          <p:cNvPr id="27" name="Rectangle: Rounded Corners 26">
+            <a:extLst>
+              <a:ext uri="{FF2B5EF4-FFF2-40B4-BE49-F238E27FC236}">
+                <a16:creationId xmlns:a16="http://schemas.microsoft.com/office/drawing/2014/main" id="{CB85928E-343A-15E7-DAA1-A195828C1005}"/>
+              </a:ext>
+            </a:extLst>
+          </p:cNvPr>
+          <p:cNvSpPr/>
+          <p:nvPr/>
+        </p:nvSpPr>
+        <p:spPr>
+          <a:xfrm>
+            <a:off x="10469882" y="3976879"/>
+            <a:ext cx="1415034" cy="364582"/>
+          </a:xfrm>
+          <a:prstGeom prst="roundRect">
+            <a:avLst/>
+          </a:prstGeom>
+        </p:spPr>
+        <p:style>
+          <a:lnRef idx="2">
+            <a:schemeClr val="accent1">
+              <a:shade val="15000"/>
+            </a:schemeClr>
+          </a:lnRef>
+          <a:fillRef idx="1">
+            <a:schemeClr val="accent1"/>
+          </a:fillRef>
+          <a:effectRef idx="0">
+            <a:schemeClr val="accent1"/>
+          </a:effectRef>
+          <a:fontRef idx="minor">
+            <a:schemeClr val="lt1"/>
+          </a:fontRef>
+        </p:style>
+        <p:txBody>
+          <a:bodyPr rtlCol="0" anchor="ctr"/>
+          <a:lstStyle/>
+          <a:p>
+            <a:pPr algn="ctr"/>
+            <a:r>
+              <a:rPr lang="en-IN" dirty="0"/>
+              <a:t>2511.00</a:t>
+            </a:r>
+          </a:p>
+        </p:txBody>
+      </p:sp>
+      <p:sp>
+        <p:nvSpPr>
+          <p:cNvPr id="28" name="Rectangle: Rounded Corners 27">
+            <a:extLst>
+              <a:ext uri="{FF2B5EF4-FFF2-40B4-BE49-F238E27FC236}">
+                <a16:creationId xmlns:a16="http://schemas.microsoft.com/office/drawing/2014/main" id="{2B3619BD-CE3C-BAE4-5306-C7584D87E3E1}"/>
+              </a:ext>
+            </a:extLst>
+          </p:cNvPr>
+          <p:cNvSpPr/>
+          <p:nvPr/>
+        </p:nvSpPr>
+        <p:spPr>
+          <a:xfrm>
+            <a:off x="6189730" y="4508535"/>
+            <a:ext cx="1136142" cy="301752"/>
+          </a:xfrm>
+          <a:prstGeom prst="roundRect">
+            <a:avLst/>
+          </a:prstGeom>
+        </p:spPr>
+        <p:style>
+          <a:lnRef idx="2">
+            <a:schemeClr val="accent1">
+              <a:shade val="15000"/>
+            </a:schemeClr>
+          </a:lnRef>
+          <a:fillRef idx="1">
+            <a:schemeClr val="accent1"/>
+          </a:fillRef>
+          <a:effectRef idx="0">
+            <a:schemeClr val="accent1"/>
+          </a:effectRef>
+          <a:fontRef idx="minor">
+            <a:schemeClr val="lt1"/>
+          </a:fontRef>
+        </p:style>
+        <p:txBody>
+          <a:bodyPr rtlCol="0" anchor="ctr"/>
+          <a:lstStyle/>
+          <a:p>
+            <a:r>
+              <a:rPr lang="en-IN" dirty="0"/>
+              <a:t>Leave</a:t>
+            </a:r>
+          </a:p>
+        </p:txBody>
+      </p:sp>
+      <p:sp>
+        <p:nvSpPr>
+          <p:cNvPr id="29" name="Rectangle: Rounded Corners 28">
+            <a:extLst>
+              <a:ext uri="{FF2B5EF4-FFF2-40B4-BE49-F238E27FC236}">
+                <a16:creationId xmlns:a16="http://schemas.microsoft.com/office/drawing/2014/main" id="{6D1783A1-7B86-1147-B264-7DBDFB8C195B}"/>
+              </a:ext>
+            </a:extLst>
+          </p:cNvPr>
+          <p:cNvSpPr/>
+          <p:nvPr/>
+        </p:nvSpPr>
+        <p:spPr>
+          <a:xfrm>
+            <a:off x="7452362" y="4477120"/>
+            <a:ext cx="1415034" cy="364582"/>
+          </a:xfrm>
+          <a:prstGeom prst="roundRect">
+            <a:avLst/>
+          </a:prstGeom>
+        </p:spPr>
+        <p:style>
+          <a:lnRef idx="2">
+            <a:schemeClr val="accent1">
+              <a:shade val="15000"/>
+            </a:schemeClr>
+          </a:lnRef>
+          <a:fillRef idx="1">
+            <a:schemeClr val="accent1"/>
+          </a:fillRef>
+          <a:effectRef idx="0">
+            <a:schemeClr val="accent1"/>
+          </a:effectRef>
+          <a:fontRef idx="minor">
+            <a:schemeClr val="lt1"/>
+          </a:fontRef>
+        </p:style>
+        <p:txBody>
+          <a:bodyPr rtlCol="0" anchor="ctr"/>
+          <a:lstStyle/>
+          <a:p>
+            <a:pPr algn="ctr"/>
+            <a:r>
+              <a:rPr lang="en-IN" dirty="0"/>
+              <a:t>53321.00</a:t>
+            </a:r>
+          </a:p>
+        </p:txBody>
+      </p:sp>
+      <p:sp>
+        <p:nvSpPr>
+          <p:cNvPr id="30" name="TextBox 29">
+            <a:extLst>
+              <a:ext uri="{FF2B5EF4-FFF2-40B4-BE49-F238E27FC236}">
+                <a16:creationId xmlns:a16="http://schemas.microsoft.com/office/drawing/2014/main" id="{BD8FCDF4-77AF-F19B-C636-0C46E2F2A452}"/>
+              </a:ext>
+            </a:extLst>
+          </p:cNvPr>
+          <p:cNvSpPr txBox="1"/>
+          <p:nvPr/>
+        </p:nvSpPr>
+        <p:spPr>
+          <a:xfrm>
+            <a:off x="8877683" y="4455671"/>
+            <a:ext cx="337185" cy="369332"/>
+          </a:xfrm>
+          <a:prstGeom prst="rect">
+            <a:avLst/>
+          </a:prstGeom>
+          <a:noFill/>
+        </p:spPr>
+        <p:txBody>
+          <a:bodyPr wrap="square" rtlCol="0">
+            <a:spAutoFit/>
+          </a:bodyPr>
+          <a:lstStyle/>
+          <a:p>
+            <a:r>
+              <a:rPr lang="en-IN" dirty="0"/>
+              <a:t>X</a:t>
+            </a:r>
+          </a:p>
+        </p:txBody>
+      </p:sp>
+      <p:sp>
+        <p:nvSpPr>
+          <p:cNvPr id="31" name="Rectangle: Rounded Corners 30">
+            <a:extLst>
+              <a:ext uri="{FF2B5EF4-FFF2-40B4-BE49-F238E27FC236}">
+                <a16:creationId xmlns:a16="http://schemas.microsoft.com/office/drawing/2014/main" id="{BC0082C0-F45B-02BC-6FDD-01400BDBE33B}"/>
+              </a:ext>
+            </a:extLst>
+          </p:cNvPr>
+          <p:cNvSpPr/>
+          <p:nvPr/>
+        </p:nvSpPr>
+        <p:spPr>
+          <a:xfrm>
+            <a:off x="9177149" y="4458046"/>
+            <a:ext cx="690372" cy="364582"/>
+          </a:xfrm>
+          <a:prstGeom prst="roundRect">
+            <a:avLst/>
+          </a:prstGeom>
+        </p:spPr>
+        <p:style>
+          <a:lnRef idx="2">
+            <a:schemeClr val="accent1">
+              <a:shade val="15000"/>
+            </a:schemeClr>
+          </a:lnRef>
+          <a:fillRef idx="1">
+            <a:schemeClr val="accent1"/>
+          </a:fillRef>
+          <a:effectRef idx="0">
+            <a:schemeClr val="accent1"/>
+          </a:effectRef>
+          <a:fontRef idx="minor">
+            <a:schemeClr val="lt1"/>
+          </a:fontRef>
+        </p:style>
+        <p:txBody>
+          <a:bodyPr rtlCol="0" anchor="ctr"/>
+          <a:lstStyle/>
+          <a:p>
+            <a:pPr algn="ctr"/>
+            <a:r>
+              <a:rPr lang="en-IN" dirty="0"/>
+              <a:t>2</a:t>
+            </a:r>
+          </a:p>
+        </p:txBody>
+      </p:sp>
+      <p:sp>
+        <p:nvSpPr>
+          <p:cNvPr id="32" name="Rectangle: Rounded Corners 31">
+            <a:extLst>
+              <a:ext uri="{FF2B5EF4-FFF2-40B4-BE49-F238E27FC236}">
+                <a16:creationId xmlns:a16="http://schemas.microsoft.com/office/drawing/2014/main" id="{440B53B0-D928-B74C-DB57-88C9E759D5AA}"/>
+              </a:ext>
+            </a:extLst>
+          </p:cNvPr>
+          <p:cNvSpPr/>
+          <p:nvPr/>
+        </p:nvSpPr>
+        <p:spPr>
+          <a:xfrm>
+            <a:off x="10469882" y="4407799"/>
+            <a:ext cx="1415034" cy="364582"/>
+          </a:xfrm>
+          <a:prstGeom prst="roundRect">
+            <a:avLst/>
+          </a:prstGeom>
+        </p:spPr>
+        <p:style>
+          <a:lnRef idx="2">
+            <a:schemeClr val="accent1">
+              <a:shade val="15000"/>
+            </a:schemeClr>
+          </a:lnRef>
+          <a:fillRef idx="1">
+            <a:schemeClr val="accent1"/>
+          </a:fillRef>
+          <a:effectRef idx="0">
+            <a:schemeClr val="accent1"/>
+          </a:effectRef>
+          <a:fontRef idx="minor">
+            <a:schemeClr val="lt1"/>
+          </a:fontRef>
+        </p:style>
+        <p:txBody>
+          <a:bodyPr rtlCol="0" anchor="ctr"/>
+          <a:lstStyle/>
+          <a:p>
+            <a:pPr algn="ctr"/>
+            <a:r>
+              <a:rPr lang="en-IN" dirty="0"/>
+              <a:t>6522.00</a:t>
+            </a:r>
+          </a:p>
+        </p:txBody>
+      </p:sp>
     </p:spTree>
     <p:extLst>
       <p:ext uri="{BB962C8B-B14F-4D97-AF65-F5344CB8AC3E}">
         <p14:creationId xmlns:p14="http://schemas.microsoft.com/office/powerpoint/2010/main" val="2069953299"/>
+      </p:ext>
+    </p:extLst>
+  </p:cSld>
+  <p:clrMapOvr>
+    <a:masterClrMapping/>
+  </p:clrMapOvr>
+</p:sld>
+</file>
+
+<file path=ppt/slides/slide3.xml><?xml version="1.0" encoding="utf-8"?>
+<p:sld xmlns:a="http://schemas.openxmlformats.org/drawingml/2006/main" xmlns:r="http://schemas.openxmlformats.org/officeDocument/2006/relationships" xmlns:p="http://schemas.openxmlformats.org/presentationml/2006/main">
+  <p:cSld>
+    <p:spTree>
+      <p:nvGrpSpPr>
+        <p:cNvPr id="1" name=""/>
+        <p:cNvGrpSpPr/>
+        <p:nvPr/>
+      </p:nvGrpSpPr>
+      <p:grpSpPr>
+        <a:xfrm>
+          <a:off x="0" y="0"/>
+          <a:ext cx="0" cy="0"/>
+          <a:chOff x="0" y="0"/>
+          <a:chExt cx="0" cy="0"/>
+        </a:xfrm>
+      </p:grpSpPr>
+      <p:graphicFrame>
+        <p:nvGraphicFramePr>
+          <p:cNvPr id="4" name="Table 3">
+            <a:extLst>
+              <a:ext uri="{FF2B5EF4-FFF2-40B4-BE49-F238E27FC236}">
+                <a16:creationId xmlns:a16="http://schemas.microsoft.com/office/drawing/2014/main" id="{166B8E4C-64D0-B09F-F731-656F19FC1E34}"/>
+              </a:ext>
+            </a:extLst>
+          </p:cNvPr>
+          <p:cNvGraphicFramePr>
+            <a:graphicFrameLocks noGrp="1"/>
+          </p:cNvGraphicFramePr>
+          <p:nvPr>
+            <p:extLst>
+              <p:ext uri="{D42A27DB-BD31-4B8C-83A1-F6EECF244321}">
+                <p14:modId xmlns:p14="http://schemas.microsoft.com/office/powerpoint/2010/main" val="943272285"/>
+              </p:ext>
+            </p:extLst>
+          </p:nvPr>
+        </p:nvGraphicFramePr>
+        <p:xfrm>
+          <a:off x="1346200" y="2100410"/>
+          <a:ext cx="8128000" cy="741680"/>
+        </p:xfrm>
+        <a:graphic>
+          <a:graphicData uri="http://schemas.openxmlformats.org/drawingml/2006/table">
+            <a:tbl>
+              <a:tblPr firstRow="1" bandRow="1">
+                <a:tableStyleId>{5C22544A-7EE6-4342-B048-85BDC9FD1C3A}</a:tableStyleId>
+              </a:tblPr>
+              <a:tblGrid>
+                <a:gridCol w="4064000">
+                  <a:extLst>
+                    <a:ext uri="{9D8B030D-6E8A-4147-A177-3AD203B41FA5}">
+                      <a16:colId xmlns:a16="http://schemas.microsoft.com/office/drawing/2014/main" val="2801595198"/>
+                    </a:ext>
+                  </a:extLst>
+                </a:gridCol>
+                <a:gridCol w="4064000">
+                  <a:extLst>
+                    <a:ext uri="{9D8B030D-6E8A-4147-A177-3AD203B41FA5}">
+                      <a16:colId xmlns:a16="http://schemas.microsoft.com/office/drawing/2014/main" val="1566295071"/>
+                    </a:ext>
+                  </a:extLst>
+                </a:gridCol>
+              </a:tblGrid>
+              <a:tr h="370840">
+                <a:tc>
+                  <a:txBody>
+                    <a:bodyPr/>
+                    <a:lstStyle/>
+                    <a:p>
+                      <a:r>
+                        <a:rPr lang="en-US" dirty="0"/>
+                        <a:t>Date</a:t>
+                      </a:r>
+                      <a:endParaRPr lang="en-IN" dirty="0"/>
+                    </a:p>
+                  </a:txBody>
+                  <a:tcPr/>
+                </a:tc>
+                <a:tc>
+                  <a:txBody>
+                    <a:bodyPr/>
+                    <a:lstStyle/>
+                    <a:p>
+                      <a:r>
+                        <a:rPr lang="en-US" dirty="0"/>
+                        <a:t>Purpose</a:t>
+                      </a:r>
+                      <a:endParaRPr lang="en-IN" dirty="0"/>
+                    </a:p>
+                  </a:txBody>
+                  <a:tcPr/>
+                </a:tc>
+                <a:extLst>
+                  <a:ext uri="{0D108BD9-81ED-4DB2-BD59-A6C34878D82A}">
+                    <a16:rowId xmlns:a16="http://schemas.microsoft.com/office/drawing/2014/main" val="1905843625"/>
+                  </a:ext>
+                </a:extLst>
+              </a:tr>
+              <a:tr h="370840">
+                <a:tc>
+                  <a:txBody>
+                    <a:bodyPr/>
+                    <a:lstStyle/>
+                    <a:p>
+                      <a:r>
+                        <a:rPr lang="en-US" dirty="0"/>
+                        <a:t>25.10.2026</a:t>
+                      </a:r>
+                      <a:endParaRPr lang="en-IN" dirty="0"/>
+                    </a:p>
+                  </a:txBody>
+                  <a:tcPr/>
+                </a:tc>
+                <a:tc>
+                  <a:txBody>
+                    <a:bodyPr/>
+                    <a:lstStyle/>
+                    <a:p>
+                      <a:r>
+                        <a:rPr lang="en-US" dirty="0"/>
+                        <a:t>Birthday</a:t>
+                      </a:r>
+                      <a:endParaRPr lang="en-IN" dirty="0"/>
+                    </a:p>
+                  </a:txBody>
+                  <a:tcPr/>
+                </a:tc>
+                <a:extLst>
+                  <a:ext uri="{0D108BD9-81ED-4DB2-BD59-A6C34878D82A}">
+                    <a16:rowId xmlns:a16="http://schemas.microsoft.com/office/drawing/2014/main" val="2282568123"/>
+                  </a:ext>
+                </a:extLst>
+              </a:tr>
+            </a:tbl>
+          </a:graphicData>
+        </a:graphic>
+      </p:graphicFrame>
+      <p:sp>
+        <p:nvSpPr>
+          <p:cNvPr id="5" name="TextBox 4">
+            <a:extLst>
+              <a:ext uri="{FF2B5EF4-FFF2-40B4-BE49-F238E27FC236}">
+                <a16:creationId xmlns:a16="http://schemas.microsoft.com/office/drawing/2014/main" id="{2EAF2B15-82C4-8E9B-4EF6-DB4DAD0C5B8F}"/>
+              </a:ext>
+            </a:extLst>
+          </p:cNvPr>
+          <p:cNvSpPr txBox="1"/>
+          <p:nvPr/>
+        </p:nvSpPr>
+        <p:spPr>
+          <a:xfrm>
+            <a:off x="8238744" y="2842090"/>
+            <a:ext cx="1235456" cy="307777"/>
+          </a:xfrm>
+          <a:prstGeom prst="rect">
+            <a:avLst/>
+          </a:prstGeom>
+          <a:noFill/>
+        </p:spPr>
+        <p:txBody>
+          <a:bodyPr wrap="square" rtlCol="0">
+            <a:spAutoFit/>
+          </a:bodyPr>
+          <a:lstStyle/>
+          <a:p>
+            <a:r>
+              <a:rPr lang="en-US" sz="1400" dirty="0"/>
+              <a:t>+ add row</a:t>
+            </a:r>
+            <a:endParaRPr lang="en-IN" sz="1400" dirty="0"/>
+          </a:p>
+        </p:txBody>
+      </p:sp>
+      <p:sp>
+        <p:nvSpPr>
+          <p:cNvPr id="7" name="TextBox 6">
+            <a:extLst>
+              <a:ext uri="{FF2B5EF4-FFF2-40B4-BE49-F238E27FC236}">
+                <a16:creationId xmlns:a16="http://schemas.microsoft.com/office/drawing/2014/main" id="{7DD89A91-B480-F801-0E57-B0C5BA32EF4A}"/>
+              </a:ext>
+            </a:extLst>
+          </p:cNvPr>
+          <p:cNvSpPr txBox="1"/>
+          <p:nvPr/>
+        </p:nvSpPr>
+        <p:spPr>
+          <a:xfrm>
+            <a:off x="10764774" y="1915744"/>
+            <a:ext cx="1067562" cy="646331"/>
+          </a:xfrm>
+          <a:prstGeom prst="rect">
+            <a:avLst/>
+          </a:prstGeom>
+          <a:noFill/>
+        </p:spPr>
+        <p:txBody>
+          <a:bodyPr wrap="square">
+            <a:spAutoFit/>
+          </a:bodyPr>
+          <a:lstStyle/>
+          <a:p>
+            <a:r>
+              <a:rPr lang="en-US" sz="1800" dirty="0"/>
+              <a:t>add row button</a:t>
+            </a:r>
+            <a:endParaRPr lang="en-IN" dirty="0"/>
+          </a:p>
+        </p:txBody>
+      </p:sp>
+      <p:cxnSp>
+        <p:nvCxnSpPr>
+          <p:cNvPr id="9" name="Straight Arrow Connector 8">
+            <a:extLst>
+              <a:ext uri="{FF2B5EF4-FFF2-40B4-BE49-F238E27FC236}">
+                <a16:creationId xmlns:a16="http://schemas.microsoft.com/office/drawing/2014/main" id="{7DEBFBFA-82AA-0355-4F9E-66BDF44950E0}"/>
+              </a:ext>
+            </a:extLst>
+          </p:cNvPr>
+          <p:cNvCxnSpPr>
+            <a:cxnSpLocks/>
+            <a:stCxn id="7" idx="2"/>
+            <a:endCxn id="5" idx="3"/>
+          </p:cNvCxnSpPr>
+          <p:nvPr/>
+        </p:nvCxnSpPr>
+        <p:spPr>
+          <a:xfrm flipH="1">
+            <a:off x="9474200" y="2562075"/>
+            <a:ext cx="1824355" cy="433904"/>
+          </a:xfrm>
+          <a:prstGeom prst="straightConnector1">
+            <a:avLst/>
+          </a:prstGeom>
+          <a:ln>
+            <a:tailEnd type="triangle"/>
+          </a:ln>
+        </p:spPr>
+        <p:style>
+          <a:lnRef idx="2">
+            <a:schemeClr val="accent1"/>
+          </a:lnRef>
+          <a:fillRef idx="0">
+            <a:schemeClr val="accent1"/>
+          </a:fillRef>
+          <a:effectRef idx="1">
+            <a:schemeClr val="accent1"/>
+          </a:effectRef>
+          <a:fontRef idx="minor">
+            <a:schemeClr val="tx1"/>
+          </a:fontRef>
+        </p:style>
+      </p:cxnSp>
+    </p:spTree>
+    <p:extLst>
+      <p:ext uri="{BB962C8B-B14F-4D97-AF65-F5344CB8AC3E}">
+        <p14:creationId xmlns:p14="http://schemas.microsoft.com/office/powerpoint/2010/main" val="1314427142"/>
+      </p:ext>
+    </p:extLst>
+  </p:cSld>
+  <p:clrMapOvr>
+    <a:masterClrMapping/>
+  </p:clrMapOvr>
+</p:sld>
+</file>
+
+<file path=ppt/slides/slide4.xml><?xml version="1.0" encoding="utf-8"?>
+<p:sld xmlns:a="http://schemas.openxmlformats.org/drawingml/2006/main" xmlns:r="http://schemas.openxmlformats.org/officeDocument/2006/relationships" xmlns:p="http://schemas.openxmlformats.org/presentationml/2006/main">
+  <p:cSld>
+    <p:spTree>
+      <p:nvGrpSpPr>
+        <p:cNvPr id="1" name=""/>
+        <p:cNvGrpSpPr/>
+        <p:nvPr/>
+      </p:nvGrpSpPr>
+      <p:grpSpPr>
+        <a:xfrm>
+          <a:off x="0" y="0"/>
+          <a:ext cx="0" cy="0"/>
+          <a:chOff x="0" y="0"/>
+          <a:chExt cx="0" cy="0"/>
+        </a:xfrm>
+      </p:grpSpPr>
+      <p:sp>
+        <p:nvSpPr>
+          <p:cNvPr id="4" name="Rectangle: Rounded Corners 3">
+            <a:extLst>
+              <a:ext uri="{FF2B5EF4-FFF2-40B4-BE49-F238E27FC236}">
+                <a16:creationId xmlns:a16="http://schemas.microsoft.com/office/drawing/2014/main" id="{2B4C5005-E60E-56C8-622E-97CE6BC7ECE5}"/>
+              </a:ext>
+            </a:extLst>
+          </p:cNvPr>
+          <p:cNvSpPr/>
+          <p:nvPr/>
+        </p:nvSpPr>
+        <p:spPr>
+          <a:xfrm>
+            <a:off x="6601968" y="4050792"/>
+            <a:ext cx="2697480" cy="448056"/>
+          </a:xfrm>
+          <a:prstGeom prst="roundRect">
+            <a:avLst/>
+          </a:prstGeom>
+        </p:spPr>
+        <p:style>
+          <a:lnRef idx="2">
+            <a:schemeClr val="accent1">
+              <a:shade val="15000"/>
+            </a:schemeClr>
+          </a:lnRef>
+          <a:fillRef idx="1">
+            <a:schemeClr val="accent1"/>
+          </a:fillRef>
+          <a:effectRef idx="0">
+            <a:schemeClr val="accent1"/>
+          </a:effectRef>
+          <a:fontRef idx="minor">
+            <a:schemeClr val="lt1"/>
+          </a:fontRef>
+        </p:style>
+        <p:txBody>
+          <a:bodyPr rtlCol="0" anchor="ctr"/>
+          <a:lstStyle/>
+          <a:p>
+            <a:pPr algn="ctr"/>
+            <a:endParaRPr lang="en-IN"/>
+          </a:p>
+        </p:txBody>
+      </p:sp>
+    </p:spTree>
+    <p:extLst>
+      <p:ext uri="{BB962C8B-B14F-4D97-AF65-F5344CB8AC3E}">
+        <p14:creationId xmlns:p14="http://schemas.microsoft.com/office/powerpoint/2010/main" val="1667848037"/>
       </p:ext>
     </p:extLst>
   </p:cSld>
